--- a/estandar-a/templates/3-4-3-material-capacitacion.pptx
+++ b/estandar-a/templates/3-4-3-material-capacitacion.pptx
@@ -3256,7 +3256,7 @@
                 <a:solidFill>
                   <a:srgbClr val="F7C031"/>
                 </a:solidFill>
-                <a:latin typeface="Afacad"/>
+                <a:latin typeface="Calibri"/>
               </a:rPr>
               <a:t>PRODUCTO 3.4.3  ·  ELEMENTO 2 · Ejecutar</a:t>
             </a:r>
@@ -3291,7 +3291,7 @@
                 <a:solidFill>
                   <a:srgbClr val="FFFFFF"/>
                 </a:solidFill>
-                <a:latin typeface="Afacad"/>
+                <a:latin typeface="Calibri"/>
               </a:rPr>
               <a:t>Material de capacitación para la adopción de soluciones de IA</a:t>
             </a:r>
@@ -3326,7 +3326,7 @@
                 <a:solidFill>
                   <a:srgbClr val="EAF4FF"/>
                 </a:solidFill>
-                <a:latin typeface="Afacad"/>
+                <a:latin typeface="Calibri"/>
               </a:rPr>
               <a:t>Material de capacitación al personal</a:t>
             </a:r>
@@ -3361,7 +3361,7 @@
                 <a:solidFill>
                   <a:srgbClr val="F7C031"/>
                 </a:solidFill>
-                <a:latin typeface="Afacad"/>
+                <a:latin typeface="Calibri"/>
               </a:rPr>
               <a:t>Mi CompañIA  ·  FUNDES México con el apoyo de Google.org</a:t>
             </a:r>
@@ -3552,7 +3552,7 @@
                 <a:solidFill>
                   <a:srgbClr val="F7C031"/>
                 </a:solidFill>
-                <a:latin typeface="Afacad"/>
+                <a:latin typeface="Calibri"/>
               </a:rPr>
               <a:t>Mi CompañIA</a:t>
             </a:r>
@@ -3587,7 +3587,7 @@
                 <a:solidFill>
                   <a:srgbClr val="FFFFFF"/>
                 </a:solidFill>
-                <a:latin typeface="Afacad"/>
+                <a:latin typeface="Calibri"/>
               </a:rPr>
               <a:t>· Material de capacitación para la adopción de soluciones de IA</a:t>
             </a:r>
@@ -3622,7 +3622,7 @@
                 <a:solidFill>
                   <a:srgbClr val="F7C031"/>
                 </a:solidFill>
-                <a:latin typeface="Afacad"/>
+                <a:latin typeface="Calibri"/>
               </a:rPr>
               <a:t>Producto 3.4.3</a:t>
             </a:r>
@@ -3708,7 +3708,7 @@
                 <a:solidFill>
                   <a:srgbClr val="F7C031"/>
                 </a:solidFill>
-                <a:latin typeface="Afacad"/>
+                <a:latin typeface="Calibri"/>
               </a:rPr>
               <a:t>LÁMINA 6</a:t>
             </a:r>
@@ -3743,7 +3743,7 @@
                 <a:solidFill>
                   <a:srgbClr val="28467E"/>
                 </a:solidFill>
-                <a:latin typeface="Afacad"/>
+                <a:latin typeface="Calibri"/>
               </a:rPr>
               <a:t>Adaptación al nivel digital del personal</a:t>
             </a:r>
@@ -3821,7 +3821,7 @@
                 <a:solidFill>
                   <a:srgbClr val="4B5563"/>
                 </a:solidFill>
-                <a:latin typeface="Afacad"/>
+                <a:latin typeface="Calibri"/>
               </a:rPr>
               <a:t>Si el personal no maneja tecnicismos, usa lenguaje cotidiano. Si están acostumbrados a apps, puedes ir más rápido.</a:t>
             </a:r>
@@ -4019,7 +4019,7 @@
                 <a:solidFill>
                   <a:srgbClr val="28467E"/>
                 </a:solidFill>
-                <a:latin typeface="Afacad"/>
+                <a:latin typeface="Calibri"/>
               </a:rPr>
               <a:t>Mi CompañIA  ·  FUNDES México  ·  AIxMiPyMEs   ·   10 / 12</a:t>
             </a:r>
@@ -4158,7 +4158,7 @@
                 <a:solidFill>
                   <a:srgbClr val="F7C031"/>
                 </a:solidFill>
-                <a:latin typeface="Afacad"/>
+                <a:latin typeface="Calibri"/>
               </a:rPr>
               <a:t>Mi CompañIA</a:t>
             </a:r>
@@ -4193,7 +4193,7 @@
                 <a:solidFill>
                   <a:srgbClr val="FFFFFF"/>
                 </a:solidFill>
-                <a:latin typeface="Afacad"/>
+                <a:latin typeface="Calibri"/>
               </a:rPr>
               <a:t>· Material de capacitación para la adopción de soluciones de IA</a:t>
             </a:r>
@@ -4228,7 +4228,7 @@
                 <a:solidFill>
                   <a:srgbClr val="F7C031"/>
                 </a:solidFill>
-                <a:latin typeface="Afacad"/>
+                <a:latin typeface="Calibri"/>
               </a:rPr>
               <a:t>Producto 3.4.3</a:t>
             </a:r>
@@ -4314,7 +4314,7 @@
                 <a:solidFill>
                   <a:srgbClr val="F7C031"/>
                 </a:solidFill>
-                <a:latin typeface="Afacad"/>
+                <a:latin typeface="Calibri"/>
               </a:rPr>
               <a:t>LÁMINA 7</a:t>
             </a:r>
@@ -4349,7 +4349,7 @@
                 <a:solidFill>
                   <a:srgbClr val="28467E"/>
                 </a:solidFill>
-                <a:latin typeface="Afacad"/>
+                <a:latin typeface="Calibri"/>
               </a:rPr>
               <a:t>Lámina final · Recursos y soporte</a:t>
             </a:r>
@@ -4427,7 +4427,7 @@
                 <a:solidFill>
                   <a:srgbClr val="4B5563"/>
                 </a:solidFill>
-                <a:latin typeface="Afacad"/>
+                <a:latin typeface="Calibri"/>
               </a:rPr>
               <a:t>¿A quién acudir si algo falla? ¿Dónde encontrar este material después? ¿Cuándo se actualiza?</a:t>
             </a:r>
@@ -4625,7 +4625,7 @@
                 <a:solidFill>
                   <a:srgbClr val="28467E"/>
                 </a:solidFill>
-                <a:latin typeface="Afacad"/>
+                <a:latin typeface="Calibri"/>
               </a:rPr>
               <a:t>Mi CompañIA  ·  FUNDES México  ·  AIxMiPyMEs   ·   11 / 12</a:t>
             </a:r>
@@ -4721,7 +4721,7 @@
                 <a:solidFill>
                   <a:srgbClr val="F7C031"/>
                 </a:solidFill>
-                <a:latin typeface="Afacad"/>
+                <a:latin typeface="Calibri"/>
               </a:rPr>
               <a:t>¿Dudas durante la operación?</a:t>
             </a:r>
@@ -4756,7 +4756,7 @@
                 <a:solidFill>
                   <a:srgbClr val="FFFFFF"/>
                 </a:solidFill>
-                <a:latin typeface="Afacad"/>
+                <a:latin typeface="Calibri"/>
               </a:rPr>
               <a:t>Tu consultor sigue disponible. Datos de contacto en el Acta de cierre (producto 4.4.2).</a:t>
             </a:r>
@@ -4791,7 +4791,7 @@
                 <a:solidFill>
                   <a:srgbClr val="EAF4FF"/>
                 </a:solidFill>
-                <a:latin typeface="Afacad"/>
+                <a:latin typeface="Calibri"/>
               </a:rPr>
               <a:t>Este material puede actualizarse cuando se añadan nuevas FAQ o flujos.</a:t>
             </a:r>
@@ -4869,7 +4869,7 @@
                 <a:solidFill>
                   <a:srgbClr val="28467E"/>
                 </a:solidFill>
-                <a:latin typeface="Afacad"/>
+                <a:latin typeface="Calibri"/>
               </a:rPr>
               <a:t>Mi CompañIA  ·  FUNDES México con el apoyo de Google.org</a:t>
             </a:r>
@@ -5008,7 +5008,7 @@
                 <a:solidFill>
                   <a:srgbClr val="F7C031"/>
                 </a:solidFill>
-                <a:latin typeface="Afacad"/>
+                <a:latin typeface="Calibri"/>
               </a:rPr>
               <a:t>Mi CompañIA</a:t>
             </a:r>
@@ -5043,7 +5043,7 @@
                 <a:solidFill>
                   <a:srgbClr val="FFFFFF"/>
                 </a:solidFill>
-                <a:latin typeface="Afacad"/>
+                <a:latin typeface="Calibri"/>
               </a:rPr>
               <a:t>· Material de capacitación para la adopción de soluciones de IA</a:t>
             </a:r>
@@ -5078,7 +5078,7 @@
                 <a:solidFill>
                   <a:srgbClr val="F7C031"/>
                 </a:solidFill>
-                <a:latin typeface="Afacad"/>
+                <a:latin typeface="Calibri"/>
               </a:rPr>
               <a:t>Producto 3.4.3</a:t>
             </a:r>
@@ -5113,7 +5113,7 @@
                 <a:solidFill>
                   <a:srgbClr val="28467E"/>
                 </a:solidFill>
-                <a:latin typeface="Afacad"/>
+                <a:latin typeface="Calibri"/>
               </a:rPr>
               <a:t>Datos de esta capacitación</a:t>
             </a:r>
@@ -5148,7 +5148,7 @@
                 <a:solidFill>
                   <a:srgbClr val="4B5563"/>
                 </a:solidFill>
-                <a:latin typeface="Afacad"/>
+                <a:latin typeface="Calibri"/>
               </a:rPr>
               <a:t>Completa antes de impartirla. Define alcance, audiencia y tiempo para que el evaluador vea contexto.</a:t>
             </a:r>
@@ -5226,7 +5226,7 @@
                 <a:solidFill>
                   <a:srgbClr val="28467E"/>
                 </a:solidFill>
-                <a:latin typeface="Afacad"/>
+                <a:latin typeface="Calibri"/>
               </a:rPr>
               <a:t>Nombre de la MiPyME:</a:t>
             </a:r>
@@ -5261,7 +5261,7 @@
                 <a:solidFill>
                   <a:srgbClr val="4B5563"/>
                 </a:solidFill>
-                <a:latin typeface="Afacad"/>
+                <a:latin typeface="Calibri"/>
               </a:rPr>
               <a:t>________________________________________</a:t>
             </a:r>
@@ -5339,7 +5339,7 @@
                 <a:solidFill>
                   <a:srgbClr val="28467E"/>
                 </a:solidFill>
-                <a:latin typeface="Afacad"/>
+                <a:latin typeface="Calibri"/>
               </a:rPr>
               <a:t>Personal capacitado (nombres + cargo):</a:t>
             </a:r>
@@ -5374,7 +5374,7 @@
                 <a:solidFill>
                   <a:srgbClr val="4B5563"/>
                 </a:solidFill>
-                <a:latin typeface="Afacad"/>
+                <a:latin typeface="Calibri"/>
               </a:rPr>
               <a:t>________________________________________</a:t>
             </a:r>
@@ -5452,7 +5452,7 @@
                 <a:solidFill>
                   <a:srgbClr val="28467E"/>
                 </a:solidFill>
-                <a:latin typeface="Afacad"/>
+                <a:latin typeface="Calibri"/>
               </a:rPr>
               <a:t>Fecha de la capacitación:</a:t>
             </a:r>
@@ -5487,7 +5487,7 @@
                 <a:solidFill>
                   <a:srgbClr val="4B5563"/>
                 </a:solidFill>
-                <a:latin typeface="Afacad"/>
+                <a:latin typeface="Calibri"/>
               </a:rPr>
               <a:t>________________________________________</a:t>
             </a:r>
@@ -5565,7 +5565,7 @@
                 <a:solidFill>
                   <a:srgbClr val="28467E"/>
                 </a:solidFill>
-                <a:latin typeface="Afacad"/>
+                <a:latin typeface="Calibri"/>
               </a:rPr>
               <a:t>Duración estimada:</a:t>
             </a:r>
@@ -5600,7 +5600,7 @@
                 <a:solidFill>
                   <a:srgbClr val="4B5563"/>
                 </a:solidFill>
-                <a:latin typeface="Afacad"/>
+                <a:latin typeface="Calibri"/>
               </a:rPr>
               <a:t>________________________________________</a:t>
             </a:r>
@@ -5678,7 +5678,7 @@
                 <a:solidFill>
                   <a:srgbClr val="28467E"/>
                 </a:solidFill>
-                <a:latin typeface="Afacad"/>
+                <a:latin typeface="Calibri"/>
               </a:rPr>
               <a:t>Soluciones cubiertas en esta sesión:</a:t>
             </a:r>
@@ -5713,7 +5713,7 @@
                 <a:solidFill>
                   <a:srgbClr val="4B5563"/>
                 </a:solidFill>
-                <a:latin typeface="Afacad"/>
+                <a:latin typeface="Calibri"/>
               </a:rPr>
               <a:t>________________________________________</a:t>
             </a:r>
@@ -5791,7 +5791,7 @@
                 <a:solidFill>
                   <a:srgbClr val="28467E"/>
                 </a:solidFill>
-                <a:latin typeface="Afacad"/>
+                <a:latin typeface="Calibri"/>
               </a:rPr>
               <a:t>Mi CompañIA  ·  FUNDES México  ·  AIxMiPyMEs   ·   2 / 12</a:t>
             </a:r>
@@ -5930,7 +5930,7 @@
                 <a:solidFill>
                   <a:srgbClr val="F7C031"/>
                 </a:solidFill>
-                <a:latin typeface="Afacad"/>
+                <a:latin typeface="Calibri"/>
               </a:rPr>
               <a:t>Mi CompañIA</a:t>
             </a:r>
@@ -5965,7 +5965,7 @@
                 <a:solidFill>
                   <a:srgbClr val="FFFFFF"/>
                 </a:solidFill>
-                <a:latin typeface="Afacad"/>
+                <a:latin typeface="Calibri"/>
               </a:rPr>
               <a:t>· Material de capacitación para la adopción de soluciones de IA</a:t>
             </a:r>
@@ -6000,7 +6000,7 @@
                 <a:solidFill>
                   <a:srgbClr val="F7C031"/>
                 </a:solidFill>
-                <a:latin typeface="Afacad"/>
+                <a:latin typeface="Calibri"/>
               </a:rPr>
               <a:t>Producto 3.4.3</a:t>
             </a:r>
@@ -6035,7 +6035,7 @@
                 <a:solidFill>
                   <a:srgbClr val="28467E"/>
                 </a:solidFill>
-                <a:latin typeface="Afacad"/>
+                <a:latin typeface="Calibri"/>
               </a:rPr>
               <a:t>Criterio F21 · qué evalúa el verificador</a:t>
             </a:r>
@@ -6070,7 +6070,7 @@
                 <a:solidFill>
                   <a:srgbClr val="4B5563"/>
                 </a:solidFill>
-                <a:latin typeface="Afacad"/>
+                <a:latin typeface="Calibri"/>
               </a:rPr>
               <a:t>Texto literal del F21 oficial. Tu material debe cubrir explícitamente cada punto.</a:t>
             </a:r>
@@ -6278,7 +6278,7 @@
                 <a:solidFill>
                   <a:srgbClr val="28467E"/>
                 </a:solidFill>
-                <a:latin typeface="Afacad"/>
+                <a:latin typeface="Calibri"/>
               </a:rPr>
               <a:t>Mi CompañIA  ·  FUNDES México  ·  AIxMiPyMEs   ·   3 / 12</a:t>
             </a:r>
@@ -6417,7 +6417,7 @@
                 <a:solidFill>
                   <a:srgbClr val="F7C031"/>
                 </a:solidFill>
-                <a:latin typeface="Afacad"/>
+                <a:latin typeface="Calibri"/>
               </a:rPr>
               <a:t>Mi CompañIA</a:t>
             </a:r>
@@ -6452,7 +6452,7 @@
                 <a:solidFill>
                   <a:srgbClr val="FFFFFF"/>
                 </a:solidFill>
-                <a:latin typeface="Afacad"/>
+                <a:latin typeface="Calibri"/>
               </a:rPr>
               <a:t>· Material de capacitación para la adopción de soluciones de IA</a:t>
             </a:r>
@@ -6487,7 +6487,7 @@
                 <a:solidFill>
                   <a:srgbClr val="F7C031"/>
                 </a:solidFill>
-                <a:latin typeface="Afacad"/>
+                <a:latin typeface="Calibri"/>
               </a:rPr>
               <a:t>Producto 3.4.3</a:t>
             </a:r>
@@ -6522,7 +6522,7 @@
                 <a:solidFill>
                   <a:srgbClr val="28467E"/>
                 </a:solidFill>
-                <a:latin typeface="Afacad"/>
+                <a:latin typeface="Calibri"/>
               </a:rPr>
               <a:t>Ejemplo orientativo · caso La Espiga</a:t>
             </a:r>
@@ -6557,7 +6557,7 @@
                 <a:solidFill>
                   <a:srgbClr val="4B5563"/>
                 </a:solidFill>
-                <a:latin typeface="Afacad"/>
+                <a:latin typeface="Calibri"/>
               </a:rPr>
               <a:t>Solo para mostrar el TIPO de contenido. NO copies esto a tu MiPyME.</a:t>
             </a:r>
@@ -6686,7 +6686,7 @@
                 <a:solidFill>
                   <a:srgbClr val="28467E"/>
                 </a:solidFill>
-                <a:latin typeface="Afacad"/>
+                <a:latin typeface="Calibri"/>
               </a:rPr>
               <a:t>Mi CompañIA  ·  FUNDES México  ·  AIxMiPyMEs   ·   4 / 12</a:t>
             </a:r>
@@ -6825,7 +6825,7 @@
                 <a:solidFill>
                   <a:srgbClr val="F7C031"/>
                 </a:solidFill>
-                <a:latin typeface="Afacad"/>
+                <a:latin typeface="Calibri"/>
               </a:rPr>
               <a:t>Mi CompañIA</a:t>
             </a:r>
@@ -6860,7 +6860,7 @@
                 <a:solidFill>
                   <a:srgbClr val="FFFFFF"/>
                 </a:solidFill>
-                <a:latin typeface="Afacad"/>
+                <a:latin typeface="Calibri"/>
               </a:rPr>
               <a:t>· Material de capacitación para la adopción de soluciones de IA</a:t>
             </a:r>
@@ -6895,7 +6895,7 @@
                 <a:solidFill>
                   <a:srgbClr val="F7C031"/>
                 </a:solidFill>
-                <a:latin typeface="Afacad"/>
+                <a:latin typeface="Calibri"/>
               </a:rPr>
               <a:t>Producto 3.4.3</a:t>
             </a:r>
@@ -6981,7 +6981,7 @@
                 <a:solidFill>
                   <a:srgbClr val="F7C031"/>
                 </a:solidFill>
-                <a:latin typeface="Afacad"/>
+                <a:latin typeface="Calibri"/>
               </a:rPr>
               <a:t>LÁMINA 1</a:t>
             </a:r>
@@ -7016,7 +7016,7 @@
                 <a:solidFill>
                   <a:srgbClr val="28467E"/>
                 </a:solidFill>
-                <a:latin typeface="Afacad"/>
+                <a:latin typeface="Calibri"/>
               </a:rPr>
               <a:t>Lámina 1 · Bienvenida y objetivos del material</a:t>
             </a:r>
@@ -7094,7 +7094,7 @@
                 <a:solidFill>
                   <a:srgbClr val="4B5563"/>
                 </a:solidFill>
-                <a:latin typeface="Afacad"/>
+                <a:latin typeface="Calibri"/>
               </a:rPr>
               <a:t>¿Qué van a aprender? ¿Cuánto tiempo tomará? ¿Para qué les servirá en su día a día?</a:t>
             </a:r>
@@ -7292,7 +7292,7 @@
                 <a:solidFill>
                   <a:srgbClr val="28467E"/>
                 </a:solidFill>
-                <a:latin typeface="Afacad"/>
+                <a:latin typeface="Calibri"/>
               </a:rPr>
               <a:t>Mi CompañIA  ·  FUNDES México  ·  AIxMiPyMEs   ·   5 / 12</a:t>
             </a:r>
@@ -7431,7 +7431,7 @@
                 <a:solidFill>
                   <a:srgbClr val="F7C031"/>
                 </a:solidFill>
-                <a:latin typeface="Afacad"/>
+                <a:latin typeface="Calibri"/>
               </a:rPr>
               <a:t>Mi CompañIA</a:t>
             </a:r>
@@ -7466,7 +7466,7 @@
                 <a:solidFill>
                   <a:srgbClr val="FFFFFF"/>
                 </a:solidFill>
-                <a:latin typeface="Afacad"/>
+                <a:latin typeface="Calibri"/>
               </a:rPr>
               <a:t>· Material de capacitación para la adopción de soluciones de IA</a:t>
             </a:r>
@@ -7501,7 +7501,7 @@
                 <a:solidFill>
                   <a:srgbClr val="F7C031"/>
                 </a:solidFill>
-                <a:latin typeface="Afacad"/>
+                <a:latin typeface="Calibri"/>
               </a:rPr>
               <a:t>Producto 3.4.3</a:t>
             </a:r>
@@ -7587,7 +7587,7 @@
                 <a:solidFill>
                   <a:srgbClr val="F7C031"/>
                 </a:solidFill>
-                <a:latin typeface="Afacad"/>
+                <a:latin typeface="Calibri"/>
               </a:rPr>
               <a:t>LÁMINA 2</a:t>
             </a:r>
@@ -7622,7 +7622,7 @@
                 <a:solidFill>
                   <a:srgbClr val="28467E"/>
                 </a:solidFill>
-                <a:latin typeface="Afacad"/>
+                <a:latin typeface="Calibri"/>
               </a:rPr>
               <a:t>Láminas 2-N · Instrucciones paso a paso por herramienta</a:t>
             </a:r>
@@ -7700,7 +7700,7 @@
                 <a:solidFill>
                   <a:srgbClr val="4B5563"/>
                 </a:solidFill>
-                <a:latin typeface="Afacad"/>
+                <a:latin typeface="Calibri"/>
               </a:rPr>
               <a:t>Por cada herramienta: capturas numeradas con el flujo completo de uso. Si la herramienta tiene 5 botones importantes, dedica 1 lámina por botón. Visual antes que texto.</a:t>
             </a:r>
@@ -7898,7 +7898,7 @@
                 <a:solidFill>
                   <a:srgbClr val="28467E"/>
                 </a:solidFill>
-                <a:latin typeface="Afacad"/>
+                <a:latin typeface="Calibri"/>
               </a:rPr>
               <a:t>Mi CompañIA  ·  FUNDES México  ·  AIxMiPyMEs   ·   6 / 12</a:t>
             </a:r>
@@ -8037,7 +8037,7 @@
                 <a:solidFill>
                   <a:srgbClr val="F7C031"/>
                 </a:solidFill>
-                <a:latin typeface="Afacad"/>
+                <a:latin typeface="Calibri"/>
               </a:rPr>
               <a:t>Mi CompañIA</a:t>
             </a:r>
@@ -8072,7 +8072,7 @@
                 <a:solidFill>
                   <a:srgbClr val="FFFFFF"/>
                 </a:solidFill>
-                <a:latin typeface="Afacad"/>
+                <a:latin typeface="Calibri"/>
               </a:rPr>
               <a:t>· Material de capacitación para la adopción de soluciones de IA</a:t>
             </a:r>
@@ -8107,7 +8107,7 @@
                 <a:solidFill>
                   <a:srgbClr val="F7C031"/>
                 </a:solidFill>
-                <a:latin typeface="Afacad"/>
+                <a:latin typeface="Calibri"/>
               </a:rPr>
               <a:t>Producto 3.4.3</a:t>
             </a:r>
@@ -8193,7 +8193,7 @@
                 <a:solidFill>
                   <a:srgbClr val="F7C031"/>
                 </a:solidFill>
-                <a:latin typeface="Afacad"/>
+                <a:latin typeface="Calibri"/>
               </a:rPr>
               <a:t>LÁMINA 3</a:t>
             </a:r>
@@ -8228,7 +8228,7 @@
                 <a:solidFill>
                   <a:srgbClr val="28467E"/>
                 </a:solidFill>
-                <a:latin typeface="Afacad"/>
+                <a:latin typeface="Calibri"/>
               </a:rPr>
               <a:t>Ejemplos aplicados al contexto de la MiPyME</a:t>
             </a:r>
@@ -8306,7 +8306,7 @@
                 <a:solidFill>
                   <a:srgbClr val="4B5563"/>
                 </a:solidFill>
-                <a:latin typeface="Afacad"/>
+                <a:latin typeface="Calibri"/>
               </a:rPr>
               <a:t>Por cada herramienta: 2-3 ejemplos REALES de la MiPyME (no ejemplos genéricos). El personal debe poder decir 'ah, eso lo hago yo el lunes en la mañana'.</a:t>
             </a:r>
@@ -8504,7 +8504,7 @@
                 <a:solidFill>
                   <a:srgbClr val="28467E"/>
                 </a:solidFill>
-                <a:latin typeface="Afacad"/>
+                <a:latin typeface="Calibri"/>
               </a:rPr>
               <a:t>Mi CompañIA  ·  FUNDES México  ·  AIxMiPyMEs   ·   7 / 12</a:t>
             </a:r>
@@ -8643,7 +8643,7 @@
                 <a:solidFill>
                   <a:srgbClr val="F7C031"/>
                 </a:solidFill>
-                <a:latin typeface="Afacad"/>
+                <a:latin typeface="Calibri"/>
               </a:rPr>
               <a:t>Mi CompañIA</a:t>
             </a:r>
@@ -8678,7 +8678,7 @@
                 <a:solidFill>
                   <a:srgbClr val="FFFFFF"/>
                 </a:solidFill>
-                <a:latin typeface="Afacad"/>
+                <a:latin typeface="Calibri"/>
               </a:rPr>
               <a:t>· Material de capacitación para la adopción de soluciones de IA</a:t>
             </a:r>
@@ -8713,7 +8713,7 @@
                 <a:solidFill>
                   <a:srgbClr val="F7C031"/>
                 </a:solidFill>
-                <a:latin typeface="Afacad"/>
+                <a:latin typeface="Calibri"/>
               </a:rPr>
               <a:t>Producto 3.4.3</a:t>
             </a:r>
@@ -8799,7 +8799,7 @@
                 <a:solidFill>
                   <a:srgbClr val="F7C031"/>
                 </a:solidFill>
-                <a:latin typeface="Afacad"/>
+                <a:latin typeface="Calibri"/>
               </a:rPr>
               <a:t>LÁMINA 4</a:t>
             </a:r>
@@ -8834,7 +8834,7 @@
                 <a:solidFill>
                   <a:srgbClr val="28467E"/>
                 </a:solidFill>
-                <a:latin typeface="Afacad"/>
+                <a:latin typeface="Calibri"/>
               </a:rPr>
               <a:t>Prompts recomendados</a:t>
             </a:r>
@@ -8912,7 +8912,7 @@
                 <a:solidFill>
                   <a:srgbClr val="4B5563"/>
                 </a:solidFill>
-                <a:latin typeface="Afacad"/>
+                <a:latin typeface="Calibri"/>
               </a:rPr>
               <a:t>Lista de 5-10 prompts que ya funcionan para los casos típicos. El personal los copia/pega; no se les pide redactar prompts desde cero.</a:t>
             </a:r>
@@ -9022,7 +9022,7 @@
                 <a:solidFill>
                   <a:srgbClr val="28467E"/>
                 </a:solidFill>
-                <a:latin typeface="Consolas"/>
+                <a:latin typeface="Courier New"/>
               </a:rPr>
               <a:t>[ Pega aquí un prompt completo: rol del asistente + contexto de la MiPyME + formato de salida esperado + ejemplo. ]</a:t>
             </a:r>
@@ -9132,7 +9132,7 @@
                 <a:solidFill>
                   <a:srgbClr val="28467E"/>
                 </a:solidFill>
-                <a:latin typeface="Consolas"/>
+                <a:latin typeface="Courier New"/>
               </a:rPr>
               <a:t>[ Pega aquí un prompt completo: rol del asistente + contexto de la MiPyME + formato de salida esperado + ejemplo. ]</a:t>
             </a:r>
@@ -9210,7 +9210,7 @@
                 <a:solidFill>
                   <a:srgbClr val="28467E"/>
                 </a:solidFill>
-                <a:latin typeface="Afacad"/>
+                <a:latin typeface="Calibri"/>
               </a:rPr>
               <a:t>Mi CompañIA  ·  FUNDES México  ·  AIxMiPyMEs   ·   8 / 12</a:t>
             </a:r>
@@ -9349,7 +9349,7 @@
                 <a:solidFill>
                   <a:srgbClr val="F7C031"/>
                 </a:solidFill>
-                <a:latin typeface="Afacad"/>
+                <a:latin typeface="Calibri"/>
               </a:rPr>
               <a:t>Mi CompañIA</a:t>
             </a:r>
@@ -9384,7 +9384,7 @@
                 <a:solidFill>
                   <a:srgbClr val="FFFFFF"/>
                 </a:solidFill>
-                <a:latin typeface="Afacad"/>
+                <a:latin typeface="Calibri"/>
               </a:rPr>
               <a:t>· Material de capacitación para la adopción de soluciones de IA</a:t>
             </a:r>
@@ -9419,7 +9419,7 @@
                 <a:solidFill>
                   <a:srgbClr val="F7C031"/>
                 </a:solidFill>
-                <a:latin typeface="Afacad"/>
+                <a:latin typeface="Calibri"/>
               </a:rPr>
               <a:t>Producto 3.4.3</a:t>
             </a:r>
@@ -9505,7 +9505,7 @@
                 <a:solidFill>
                   <a:srgbClr val="F7C031"/>
                 </a:solidFill>
-                <a:latin typeface="Afacad"/>
+                <a:latin typeface="Calibri"/>
               </a:rPr>
               <a:t>LÁMINA 5</a:t>
             </a:r>
@@ -9540,7 +9540,7 @@
                 <a:solidFill>
                   <a:srgbClr val="28467E"/>
                 </a:solidFill>
-                <a:latin typeface="Afacad"/>
+                <a:latin typeface="Calibri"/>
               </a:rPr>
               <a:t>Errores frecuentes y qué hacer</a:t>
             </a:r>
@@ -9618,7 +9618,7 @@
                 <a:solidFill>
                   <a:srgbClr val="4B5563"/>
                 </a:solidFill>
-                <a:latin typeface="Afacad"/>
+                <a:latin typeface="Calibri"/>
               </a:rPr>
               <a:t>Tabla con: error común → cómo identificarlo → cómo resolverlo → cuándo escalar al consultor o a Carlos/Doña Beatriz.</a:t>
             </a:r>
@@ -10010,7 +10010,7 @@
                 <a:solidFill>
                   <a:srgbClr val="28467E"/>
                 </a:solidFill>
-                <a:latin typeface="Afacad"/>
+                <a:latin typeface="Calibri"/>
               </a:rPr>
               <a:t>Mi CompañIA  ·  FUNDES México  ·  AIxMiPyMEs   ·   9 / 12</a:t>
             </a:r>
